--- a/QARA Documents/miRFlow Software Workflow.pptx
+++ b/QARA Documents/miRFlow Software Workflow.pptx
@@ -203,7 +203,7 @@
           <a:p>
             <a:fld id="{FA796BB1-9294-4A15-9594-C9778A4ED1D6}" type="datetimeFigureOut">
               <a:rPr lang="en-US" smtClean="0"/>
-              <a:t>2/22/2026</a:t>
+              <a:t>3/27/2026</a:t>
             </a:fld>
             <a:endParaRPr lang="en-US"/>
           </a:p>
@@ -794,7 +794,7 @@
           <a:p>
             <a:fld id="{6444479B-705B-4489-957E-7E8A228BDFA0}" type="datetime1">
               <a:rPr lang="en-US" smtClean="0"/>
-              <a:t>2/22/2026</a:t>
+              <a:t>3/27/2026</a:t>
             </a:fld>
             <a:endParaRPr lang="en-US"/>
           </a:p>
@@ -994,7 +994,7 @@
           <a:p>
             <a:fld id="{C07B66AD-7C08-490A-ADA4-B47E10FB2407}" type="datetime1">
               <a:rPr lang="en-US" smtClean="0"/>
-              <a:t>2/22/2026</a:t>
+              <a:t>3/27/2026</a:t>
             </a:fld>
             <a:endParaRPr lang="en-US"/>
           </a:p>
@@ -1253,7 +1253,7 @@
           <a:p>
             <a:fld id="{05B95027-4255-49E7-9841-CD21BCC99996}" type="datetime1">
               <a:rPr lang="en-US" smtClean="0"/>
-              <a:t>2/22/2026</a:t>
+              <a:t>3/27/2026</a:t>
             </a:fld>
             <a:endParaRPr lang="en-US"/>
           </a:p>
@@ -1494,7 +1494,7 @@
           <a:p>
             <a:fld id="{9F89F774-3FA6-43B8-9241-99959C8FD463}" type="datetime1">
               <a:rPr lang="en-US" smtClean="0"/>
-              <a:t>2/22/2026</a:t>
+              <a:t>3/27/2026</a:t>
             </a:fld>
             <a:endParaRPr lang="en-US"/>
           </a:p>
@@ -1821,7 +1821,7 @@
           <a:p>
             <a:fld id="{F9504452-5DCC-4FE2-A5C9-8A5EF6714D65}" type="datetime1">
               <a:rPr lang="en-US" smtClean="0"/>
-              <a:t>2/22/2026</a:t>
+              <a:t>3/27/2026</a:t>
             </a:fld>
             <a:endParaRPr lang="en-US"/>
           </a:p>
@@ -2131,7 +2131,7 @@
           <a:p>
             <a:fld id="{E579ABC2-0180-4F3A-A895-A85BC724D472}" type="datetime1">
               <a:rPr lang="en-US" smtClean="0"/>
-              <a:t>2/22/2026</a:t>
+              <a:t>3/27/2026</a:t>
             </a:fld>
             <a:endParaRPr lang="en-US"/>
           </a:p>
@@ -2549,7 +2549,7 @@
           <a:p>
             <a:fld id="{6AEEA9BA-4E8F-439E-BEA4-91FBA01E3F5F}" type="datetime1">
               <a:rPr lang="en-US" smtClean="0"/>
-              <a:t>2/22/2026</a:t>
+              <a:t>3/27/2026</a:t>
             </a:fld>
             <a:endParaRPr lang="en-US"/>
           </a:p>
@@ -2691,7 +2691,7 @@
           <a:p>
             <a:fld id="{BE15BF18-0007-481C-AA29-413124BC3EE7}" type="datetime1">
               <a:rPr lang="en-US" smtClean="0"/>
-              <a:t>2/22/2026</a:t>
+              <a:t>3/27/2026</a:t>
             </a:fld>
             <a:endParaRPr lang="en-US"/>
           </a:p>
@@ -2853,7 +2853,7 @@
           <a:p>
             <a:fld id="{09BE9870-3748-43AD-B547-02A075CB4A1D}" type="datetime1">
               <a:rPr lang="en-US" smtClean="0"/>
-              <a:t>2/22/2026</a:t>
+              <a:t>3/27/2026</a:t>
             </a:fld>
             <a:endParaRPr lang="en-US"/>
           </a:p>
@@ -3170,7 +3170,7 @@
           <a:p>
             <a:fld id="{558E7897-33C5-4F1A-9307-D068E37F3DC7}" type="datetime1">
               <a:rPr lang="en-US" smtClean="0"/>
-              <a:t>2/22/2026</a:t>
+              <a:t>3/27/2026</a:t>
             </a:fld>
             <a:endParaRPr lang="en-US"/>
           </a:p>
@@ -3465,7 +3465,7 @@
           <a:p>
             <a:fld id="{82E171BA-CC09-47C8-A6DF-F5C5CB59CEEC}" type="datetime1">
               <a:rPr lang="en-US" smtClean="0"/>
-              <a:t>2/22/2026</a:t>
+              <a:t>3/27/2026</a:t>
             </a:fld>
             <a:endParaRPr lang="en-US"/>
           </a:p>
@@ -3706,7 +3706,7 @@
           <a:p>
             <a:fld id="{7DA38F49-B3E2-4BF0-BEC7-C30D34ABBB8D}" type="datetime1">
               <a:rPr lang="en-US" smtClean="0"/>
-              <a:t>2/22/2026</a:t>
+              <a:t>3/27/2026</a:t>
             </a:fld>
             <a:endParaRPr lang="en-US"/>
           </a:p>
@@ -5208,7 +5208,7 @@
                   <a:schemeClr val="tx1"/>
                 </a:solidFill>
               </a:rPr>
-              <a:t>FC Data Ingestion &amp; Visualiser Module</a:t>
+              <a:t>FC Data Visualiser Module</a:t>
             </a:r>
           </a:p>
           <a:p>
